--- a/output/korea_discount_slides_short.pptx
+++ b/output/korea_discount_slides_short.pptx
@@ -13,8 +13,8 @@
     <p:sldId id="261" r:id="rId7"/>
     <p:sldId id="262" r:id="rId8"/>
     <p:sldId id="263" r:id="rId9"/>
-    <p:sldId id="264" r:id="rId10"/>
-    <p:sldId id="265" r:id="rId11"/>
+    <p:sldId id="265" r:id="rId10"/>
+    <p:sldId id="264" r:id="rId11"/>
   </p:sldIdLst>
   <p:sldSz cx="12188825" cy="6858000"/>
   <p:notesSz cx="6858000" cy="9144000"/>
@@ -3441,7 +3441,7 @@
         <p:spPr>
           <a:xfrm>
             <a:off x="502920" y="137160"/>
-            <a:ext cx="11155680" cy="685800"/>
+            <a:ext cx="11155680" cy="523220"/>
           </a:xfrm>
           <a:prstGeom prst="rect">
             <a:avLst/>
@@ -3456,20 +3456,63 @@
           <a:p>
             <a:pPr algn="l"/>
             <a:r>
-              <a:rPr sz="2800" b="1">
+              <a:rPr lang="en-US" sz="2800" b="1" dirty="0">
                 <a:solidFill>
                   <a:srgbClr val="000000"/>
                 </a:solidFill>
                 <a:latin typeface="Calibri"/>
               </a:rPr>
-              <a:t>Conclusion</a:t>
-            </a:r>
-          </a:p>
-        </p:txBody>
-      </p:sp>
-      <p:sp>
-        <p:nvSpPr>
-          <p:cNvPr id="4" name="Rectangle 3"/>
+              <a:t>Appendix A: </a:t>
+            </a:r>
+            <a:r>
+              <a:rPr sz="2800" b="1" dirty="0">
+                <a:solidFill>
+                  <a:srgbClr val="000000"/>
+                </a:solidFill>
+                <a:latin typeface="Calibri"/>
+              </a:rPr>
+              <a:t>Illustrative Counterfactual Projection</a:t>
+            </a:r>
+          </a:p>
+        </p:txBody>
+      </p:sp>
+      <p:sp>
+        <p:nvSpPr>
+          <p:cNvPr id="4" name="TextBox 3"/>
+          <p:cNvSpPr txBox="1"/>
+          <p:nvPr/>
+        </p:nvSpPr>
+        <p:spPr>
+          <a:xfrm>
+            <a:off x="502920" y="777240"/>
+            <a:ext cx="11155680" cy="347472"/>
+          </a:xfrm>
+          <a:prstGeom prst="rect">
+            <a:avLst/>
+          </a:prstGeom>
+          <a:noFill/>
+        </p:spPr>
+        <p:txBody>
+          <a:bodyPr wrap="square">
+            <a:spAutoFit/>
+          </a:bodyPr>
+          <a:lstStyle/>
+          <a:p>
+            <a:r>
+              <a:rPr sz="1400">
+                <a:solidFill>
+                  <a:srgbClr val="595959"/>
+                </a:solidFill>
+                <a:latin typeface="Calibri"/>
+              </a:rPr>
+              <a:t>KOSPI P/B under a Korea governance reform scenario — stress test, not a forecast</a:t>
+            </a:r>
+          </a:p>
+        </p:txBody>
+      </p:sp>
+      <p:sp>
+        <p:nvSpPr>
+          <p:cNvPr id="5" name="Rectangle 4"/>
           <p:cNvSpPr/>
           <p:nvPr/>
         </p:nvSpPr>
@@ -3511,16 +3554,40 @@
           </a:p>
         </p:txBody>
       </p:sp>
-      <p:sp>
-        <p:nvSpPr>
-          <p:cNvPr id="5" name="TextBox 4"/>
+      <p:pic>
+        <p:nvPicPr>
+          <p:cNvPr id="6" name="Picture 5" descr="figure4_counterfactual_projection.png"/>
+          <p:cNvPicPr>
+            <a:picLocks noChangeAspect="1"/>
+          </p:cNvPicPr>
+          <p:nvPr/>
+        </p:nvPicPr>
+        <p:blipFill>
+          <a:blip r:embed="rId2"/>
+          <a:stretch>
+            <a:fillRect/>
+          </a:stretch>
+        </p:blipFill>
+        <p:spPr>
+          <a:xfrm>
+            <a:off x="274320" y="1234440"/>
+            <a:ext cx="6858000" cy="5349240"/>
+          </a:xfrm>
+          <a:prstGeom prst="rect">
+            <a:avLst/>
+          </a:prstGeom>
+        </p:spPr>
+      </p:pic>
+      <p:sp>
+        <p:nvSpPr>
+          <p:cNvPr id="7" name="TextBox 6"/>
           <p:cNvSpPr txBox="1"/>
           <p:nvPr/>
         </p:nvSpPr>
         <p:spPr>
           <a:xfrm>
-            <a:off x="502920" y="1234440"/>
-            <a:ext cx="11155680" cy="5440680"/>
+            <a:off x="7315200" y="1234440"/>
+            <a:ext cx="4572000" cy="5349240"/>
           </a:xfrm>
           <a:prstGeom prst="rect">
             <a:avLst/>
@@ -3538,7 +3605,7 @@
           <a:p>
             <a:pPr>
               <a:spcBef>
-                <a:spcPts val="800"/>
+                <a:spcPts val="0"/>
               </a:spcBef>
             </a:pPr>
             <a:r>
@@ -3548,7 +3615,7 @@
                 </a:solidFill>
                 <a:latin typeface="Calibri"/>
               </a:rPr>
-              <a:t>What we document</a:t>
+              <a:t>Construction</a:t>
             </a:r>
           </a:p>
           <a:p>
@@ -3564,7 +3631,7 @@
                 </a:solidFill>
                 <a:latin typeface="Calibri"/>
               </a:rPr>
-              <a:t>•  KOSPI P/B averages –0.177× below TOPIX (t = –3.23) and –0.601× below MSCI EM (t = –10.30)</a:t>
+              <a:t>•  Base: KOSPI P/B ≈ 0.93× (Dec 2024)</a:t>
             </a:r>
           </a:p>
           <a:p>
@@ -3580,7 +3647,7 @@
                 </a:solidFill>
                 <a:latin typeface="Calibri"/>
               </a:rPr>
-              <a:t>•  Discount widened post-2023: KOSPI ≈ 0.93× vs. TOPIX ≈ 1.36×</a:t>
+              <a:t>•  Applied rate: avg. monthly change in Japan's synthetic-control gap over first 18 post-reform months (–0.0028/month)</a:t>
             </a:r>
           </a:p>
           <a:p>
@@ -3596,13 +3663,13 @@
                 </a:solidFill>
                 <a:latin typeface="Calibri"/>
               </a:rPr>
-              <a:t>•  Three channels: chaebol opacity · minority recourse deficit · geopolitical risk premium</a:t>
+              <a:t>•  Uncertainty band: ± RMSPE = ± 0.1451</a:t>
             </a:r>
           </a:p>
           <a:p>
             <a:pPr>
               <a:spcBef>
-                <a:spcPts val="800"/>
+                <a:spcPts val="1000"/>
               </a:spcBef>
             </a:pPr>
             <a:r>
@@ -3612,7 +3679,41 @@
                 </a:solidFill>
                 <a:latin typeface="Calibri"/>
               </a:rPr>
-              <a:t>Empirical findings</a:t>
+              <a:t>
+Result</a:t>
+            </a:r>
+          </a:p>
+          <a:p>
+            <a:pPr>
+              <a:spcBef>
+                <a:spcPts val="200"/>
+              </a:spcBef>
+            </a:pPr>
+            <a:r>
+              <a:rPr sz="1300" b="0" i="0">
+                <a:solidFill>
+                  <a:srgbClr val="000000"/>
+                </a:solidFill>
+                <a:latin typeface="Calibri"/>
+              </a:rPr>
+              <a:t>Because the Japan post-2023 relative gap change is negative, the mechanical projection does not close the Korea Discount. This is a stress test, not a prediction of policy success.</a:t>
+            </a:r>
+          </a:p>
+          <a:p>
+            <a:pPr>
+              <a:spcBef>
+                <a:spcPts val="1000"/>
+              </a:spcBef>
+            </a:pPr>
+            <a:r>
+              <a:rPr sz="1500" b="1" i="0">
+                <a:solidFill>
+                  <a:srgbClr val="000000"/>
+                </a:solidFill>
+                <a:latin typeface="Calibri"/>
+              </a:rPr>
+              <a:t>
+Policy levers (if reforms are implemented)</a:t>
             </a:r>
           </a:p>
           <a:p>
@@ -3628,7 +3729,7 @@
                 </a:solidFill>
                 <a:latin typeface="Calibri"/>
               </a:rPr>
-              <a:t>•  Event-window CARs: large spread movements around reform dates, but no valid inference (saturated design, overlapping cohorts)</a:t>
+              <a:t>•  FSC mandatory P/B disclosure (comply-or-explain, not voluntary)</a:t>
             </a:r>
           </a:p>
           <a:p>
@@ -3644,7 +3745,7 @@
                 </a:solidFill>
                 <a:latin typeface="Calibri"/>
               </a:rPr>
-              <a:t>•  Panel OLS: p-values 0.625 / 0.375 / 0.500 — no robust causal evidence of a Japan governance re-rating</a:t>
+              <a:t>•  KRX ≥ 50% independent board composition for large-cap issuers</a:t>
             </a:r>
           </a:p>
           <a:p>
@@ -3660,87 +3761,7 @@
                 </a:solidFill>
                 <a:latin typeface="Calibri"/>
               </a:rPr>
-              <a:t>•  Synthetic control: full weight to MSCI EM Asia (RMSPE 0.1451); post-reform gap fades, not widens</a:t>
-            </a:r>
-          </a:p>
-          <a:p>
-            <a:pPr lvl="1">
-              <a:spcBef>
-                <a:spcPts val="300"/>
-              </a:spcBef>
-            </a:pPr>
-            <a:r>
-              <a:rPr sz="1300" b="0" i="0">
-                <a:solidFill>
-                  <a:srgbClr val="000000"/>
-                </a:solidFill>
-                <a:latin typeface="Calibri"/>
-              </a:rPr>
-              <a:t>•  Geopolitical risk coefficient: –0.02 (p = 0.40) — priced as a structural level discount</a:t>
-            </a:r>
-          </a:p>
-          <a:p>
-            <a:pPr>
-              <a:spcBef>
-                <a:spcPts val="800"/>
-              </a:spcBef>
-            </a:pPr>
-            <a:r>
-              <a:rPr sz="1600" b="1" i="0">
-                <a:solidFill>
-                  <a:srgbClr val="000000"/>
-                </a:solidFill>
-                <a:latin typeface="Calibri"/>
-              </a:rPr>
-              <a:t>Bottom line</a:t>
-            </a:r>
-          </a:p>
-          <a:p>
-            <a:pPr lvl="1">
-              <a:spcBef>
-                <a:spcPts val="300"/>
-              </a:spcBef>
-            </a:pPr>
-            <a:r>
-              <a:rPr sz="1300" b="0" i="0">
-                <a:solidFill>
-                  <a:srgbClr val="000000"/>
-                </a:solidFill>
-                <a:latin typeface="Calibri"/>
-              </a:rPr>
-              <a:t>•  The Korea Discount is persistent and statistically significant</a:t>
-            </a:r>
-          </a:p>
-          <a:p>
-            <a:pPr lvl="1">
-              <a:spcBef>
-                <a:spcPts val="300"/>
-              </a:spcBef>
-            </a:pPr>
-            <a:r>
-              <a:rPr sz="1300" b="0" i="0">
-                <a:solidFill>
-                  <a:srgbClr val="000000"/>
-                </a:solidFill>
-                <a:latin typeface="Calibri"/>
-              </a:rPr>
-              <a:t>•  Japan's experience provides useful policy benchmarks but does not identify the valuation gain Korea would realize from adopting Japan-style reforms</a:t>
-            </a:r>
-          </a:p>
-          <a:p>
-            <a:pPr lvl="1">
-              <a:spcBef>
-                <a:spcPts val="300"/>
-              </a:spcBef>
-            </a:pPr>
-            <a:r>
-              <a:rPr sz="1300" b="0" i="0">
-                <a:solidFill>
-                  <a:srgbClr val="000000"/>
-                </a:solidFill>
-                <a:latin typeface="Calibri"/>
-              </a:rPr>
-              <a:t>•  Future work: firm-level chaebol governance panel; Korea Value-Up Program event study (2024–2026+)</a:t>
+              <a:t>•  Korean Stewardship Code: mandatory voting records + NPS engagement division</a:t>
             </a:r>
           </a:p>
         </p:txBody>
@@ -9382,48 +9403,14 @@
                 </a:solidFill>
                 <a:latin typeface="Calibri"/>
               </a:rPr>
-              <a:t>Illustrative Counterfactual Projection</a:t>
-            </a:r>
-          </a:p>
-        </p:txBody>
-      </p:sp>
-      <p:sp>
-        <p:nvSpPr>
-          <p:cNvPr id="4" name="TextBox 3"/>
-          <p:cNvSpPr txBox="1"/>
-          <p:nvPr/>
-        </p:nvSpPr>
-        <p:spPr>
-          <a:xfrm>
-            <a:off x="502920" y="777240"/>
-            <a:ext cx="11155680" cy="347472"/>
-          </a:xfrm>
-          <a:prstGeom prst="rect">
-            <a:avLst/>
-          </a:prstGeom>
-          <a:noFill/>
-        </p:spPr>
-        <p:txBody>
-          <a:bodyPr wrap="square">
-            <a:spAutoFit/>
-          </a:bodyPr>
-          <a:lstStyle/>
-          <a:p>
-            <a:r>
-              <a:rPr sz="1400">
-                <a:solidFill>
-                  <a:srgbClr val="595959"/>
-                </a:solidFill>
-                <a:latin typeface="Calibri"/>
-              </a:rPr>
-              <a:t>KOSPI P/B under a Korea governance reform scenario — stress test, not a forecast</a:t>
-            </a:r>
-          </a:p>
-        </p:txBody>
-      </p:sp>
-      <p:sp>
-        <p:nvSpPr>
-          <p:cNvPr id="5" name="Rectangle 4"/>
+              <a:t>Conclusion</a:t>
+            </a:r>
+          </a:p>
+        </p:txBody>
+      </p:sp>
+      <p:sp>
+        <p:nvSpPr>
+          <p:cNvPr id="4" name="Rectangle 3"/>
           <p:cNvSpPr/>
           <p:nvPr/>
         </p:nvSpPr>
@@ -9465,40 +9452,16 @@
           </a:p>
         </p:txBody>
       </p:sp>
-      <p:pic>
-        <p:nvPicPr>
-          <p:cNvPr id="6" name="Picture 5" descr="figure4_counterfactual_projection.png"/>
-          <p:cNvPicPr>
-            <a:picLocks noChangeAspect="1"/>
-          </p:cNvPicPr>
-          <p:nvPr/>
-        </p:nvPicPr>
-        <p:blipFill>
-          <a:blip r:embed="rId2"/>
-          <a:stretch>
-            <a:fillRect/>
-          </a:stretch>
-        </p:blipFill>
-        <p:spPr>
-          <a:xfrm>
-            <a:off x="274320" y="1234440"/>
-            <a:ext cx="6858000" cy="5349240"/>
-          </a:xfrm>
-          <a:prstGeom prst="rect">
-            <a:avLst/>
-          </a:prstGeom>
-        </p:spPr>
-      </p:pic>
-      <p:sp>
-        <p:nvSpPr>
-          <p:cNvPr id="7" name="TextBox 6"/>
+      <p:sp>
+        <p:nvSpPr>
+          <p:cNvPr id="5" name="TextBox 4"/>
           <p:cNvSpPr txBox="1"/>
           <p:nvPr/>
         </p:nvSpPr>
         <p:spPr>
           <a:xfrm>
-            <a:off x="7315200" y="1234440"/>
-            <a:ext cx="4572000" cy="5349240"/>
+            <a:off x="502920" y="1234440"/>
+            <a:ext cx="11155680" cy="3801041"/>
           </a:xfrm>
           <a:prstGeom prst="rect">
             <a:avLst/>
@@ -9511,22 +9474,22 @@
           </a:bodyPr>
           <a:lstStyle/>
           <a:p>
-            <a:endParaRPr/>
+            <a:endParaRPr dirty="0"/>
           </a:p>
           <a:p>
             <a:pPr>
               <a:spcBef>
-                <a:spcPts val="0"/>
+                <a:spcPts val="800"/>
               </a:spcBef>
             </a:pPr>
             <a:r>
-              <a:rPr sz="1600" b="1" i="0">
+              <a:rPr sz="1600" b="1" i="0" dirty="0">
                 <a:solidFill>
                   <a:srgbClr val="000000"/>
                 </a:solidFill>
                 <a:latin typeface="Calibri"/>
               </a:rPr>
-              <a:t>Construction</a:t>
+              <a:t>What we document</a:t>
             </a:r>
           </a:p>
           <a:p>
@@ -9536,13 +9499,13 @@
               </a:spcBef>
             </a:pPr>
             <a:r>
-              <a:rPr sz="1300" b="0" i="0">
+              <a:rPr sz="1300" b="0" i="0" dirty="0">
                 <a:solidFill>
                   <a:srgbClr val="000000"/>
                 </a:solidFill>
                 <a:latin typeface="Calibri"/>
               </a:rPr>
-              <a:t>•  Base: KOSPI P/B ≈ 0.93× (Dec 2024)</a:t>
+              <a:t>•  KOSPI P/B averages –0.177× below TOPIX (t = –3.23) and –0.601× below MSCI EM (t = –10.30)</a:t>
             </a:r>
           </a:p>
           <a:p>
@@ -9552,13 +9515,13 @@
               </a:spcBef>
             </a:pPr>
             <a:r>
-              <a:rPr sz="1300" b="0" i="0">
+              <a:rPr sz="1300" b="0" i="0" dirty="0">
                 <a:solidFill>
                   <a:srgbClr val="000000"/>
                 </a:solidFill>
                 <a:latin typeface="Calibri"/>
               </a:rPr>
-              <a:t>•  Applied rate: avg. monthly change in Japan's synthetic-control gap over first 18 post-reform months (–0.0028/month)</a:t>
+              <a:t>•  Discount widened post-2023: KOSPI ≈ 0.93× vs. TOPIX ≈ 1.36×</a:t>
             </a:r>
           </a:p>
           <a:p>
@@ -9568,63 +9531,29 @@
               </a:spcBef>
             </a:pPr>
             <a:r>
-              <a:rPr sz="1300" b="0" i="0">
+              <a:rPr sz="1300" b="0" i="0" dirty="0">
                 <a:solidFill>
                   <a:srgbClr val="000000"/>
                 </a:solidFill>
                 <a:latin typeface="Calibri"/>
               </a:rPr>
-              <a:t>•  Uncertainty band: ± RMSPE = ± 0.1451</a:t>
+              <a:t>•  Three channels: chaebol opacity · minority recourse deficit · geopolitical risk premium</a:t>
             </a:r>
           </a:p>
           <a:p>
             <a:pPr>
               <a:spcBef>
-                <a:spcPts val="1000"/>
+                <a:spcPts val="800"/>
               </a:spcBef>
             </a:pPr>
             <a:r>
-              <a:rPr sz="1600" b="1" i="0">
+              <a:rPr sz="1600" b="1" i="0" dirty="0">
                 <a:solidFill>
                   <a:srgbClr val="000000"/>
                 </a:solidFill>
                 <a:latin typeface="Calibri"/>
               </a:rPr>
-              <a:t>
-Result</a:t>
-            </a:r>
-          </a:p>
-          <a:p>
-            <a:pPr>
-              <a:spcBef>
-                <a:spcPts val="200"/>
-              </a:spcBef>
-            </a:pPr>
-            <a:r>
-              <a:rPr sz="1300" b="0" i="0">
-                <a:solidFill>
-                  <a:srgbClr val="000000"/>
-                </a:solidFill>
-                <a:latin typeface="Calibri"/>
-              </a:rPr>
-              <a:t>Because the Japan post-2023 relative gap change is negative, the mechanical projection does not close the Korea Discount. This is a stress test, not a prediction of policy success.</a:t>
-            </a:r>
-          </a:p>
-          <a:p>
-            <a:pPr>
-              <a:spcBef>
-                <a:spcPts val="1000"/>
-              </a:spcBef>
-            </a:pPr>
-            <a:r>
-              <a:rPr sz="1500" b="1" i="0">
-                <a:solidFill>
-                  <a:srgbClr val="000000"/>
-                </a:solidFill>
-                <a:latin typeface="Calibri"/>
-              </a:rPr>
-              <a:t>
-Policy levers (if reforms are implemented)</a:t>
+              <a:t>Empirical findings</a:t>
             </a:r>
           </a:p>
           <a:p>
@@ -9634,13 +9563,13 @@
               </a:spcBef>
             </a:pPr>
             <a:r>
-              <a:rPr sz="1300" b="0" i="0">
+              <a:rPr sz="1300" b="0" i="0" dirty="0">
                 <a:solidFill>
                   <a:srgbClr val="000000"/>
                 </a:solidFill>
                 <a:latin typeface="Calibri"/>
               </a:rPr>
-              <a:t>•  FSC mandatory P/B disclosure (comply-or-explain, not voluntary)</a:t>
+              <a:t>•  Event-window CARs: large spread movements around reform dates, but no valid inference (saturated design, overlapping cohorts)</a:t>
             </a:r>
           </a:p>
           <a:p>
@@ -9650,13 +9579,13 @@
               </a:spcBef>
             </a:pPr>
             <a:r>
-              <a:rPr sz="1300" b="0" i="0">
+              <a:rPr sz="1300" b="0" i="0" dirty="0">
                 <a:solidFill>
                   <a:srgbClr val="000000"/>
                 </a:solidFill>
                 <a:latin typeface="Calibri"/>
               </a:rPr>
-              <a:t>•  KRX ≥ 50% independent board composition for large-cap issuers</a:t>
+              <a:t>•  Panel OLS: p-values 0.625 / 0.375 / 0.500 — no robust causal evidence of a Japan governance re-rating</a:t>
             </a:r>
           </a:p>
           <a:p>
@@ -9666,13 +9595,111 @@
               </a:spcBef>
             </a:pPr>
             <a:r>
-              <a:rPr sz="1300" b="0" i="0">
+              <a:rPr sz="1300" b="0" i="0" dirty="0">
                 <a:solidFill>
                   <a:srgbClr val="000000"/>
                 </a:solidFill>
                 <a:latin typeface="Calibri"/>
               </a:rPr>
-              <a:t>•  Korean Stewardship Code: mandatory voting records + NPS engagement division</a:t>
+              <a:t>•  Synthetic control: full weight to MSCI EM Asia (RMSPE 0.1451); post-reform gap fades, not widens</a:t>
+            </a:r>
+          </a:p>
+          <a:p>
+            <a:pPr lvl="1">
+              <a:spcBef>
+                <a:spcPts val="300"/>
+              </a:spcBef>
+            </a:pPr>
+            <a:r>
+              <a:rPr sz="1300" b="0" i="0" dirty="0">
+                <a:solidFill>
+                  <a:srgbClr val="000000"/>
+                </a:solidFill>
+                <a:latin typeface="Calibri"/>
+              </a:rPr>
+              <a:t>•  Geopolitical risk coefficient: –0.02 (p = 0.40) </a:t>
+            </a:r>
+            <a:r>
+              <a:rPr lang="en-US" sz="1300" b="0" i="0" dirty="0">
+                <a:solidFill>
+                  <a:srgbClr val="000000"/>
+                </a:solidFill>
+                <a:latin typeface="Calibri"/>
+              </a:rPr>
+              <a:t>is not significant,</a:t>
+            </a:r>
+            <a:r>
+              <a:rPr sz="1300" b="0" i="0" dirty="0">
+                <a:solidFill>
+                  <a:srgbClr val="000000"/>
+                </a:solidFill>
+                <a:latin typeface="Calibri"/>
+              </a:rPr>
+              <a:t> priced as a structural level discount</a:t>
+            </a:r>
+          </a:p>
+          <a:p>
+            <a:pPr>
+              <a:spcBef>
+                <a:spcPts val="800"/>
+              </a:spcBef>
+            </a:pPr>
+            <a:r>
+              <a:rPr sz="1600" b="1" i="0" dirty="0">
+                <a:solidFill>
+                  <a:srgbClr val="000000"/>
+                </a:solidFill>
+                <a:latin typeface="Calibri"/>
+              </a:rPr>
+              <a:t>Bottom line</a:t>
+            </a:r>
+          </a:p>
+          <a:p>
+            <a:pPr lvl="1">
+              <a:spcBef>
+                <a:spcPts val="300"/>
+              </a:spcBef>
+            </a:pPr>
+            <a:r>
+              <a:rPr sz="1300" b="0" i="0" dirty="0">
+                <a:solidFill>
+                  <a:srgbClr val="000000"/>
+                </a:solidFill>
+                <a:latin typeface="Calibri"/>
+              </a:rPr>
+              <a:t>•  The Korea Discount is persistent and statistically significant</a:t>
+            </a:r>
+          </a:p>
+          <a:p>
+            <a:pPr lvl="1">
+              <a:spcBef>
+                <a:spcPts val="300"/>
+              </a:spcBef>
+            </a:pPr>
+            <a:r>
+              <a:rPr sz="1300" b="0" i="0" dirty="0">
+                <a:solidFill>
+                  <a:srgbClr val="000000"/>
+                </a:solidFill>
+                <a:latin typeface="Calibri"/>
+              </a:rPr>
+              <a:t>•  Japan's experience provides useful policy benchmarks but does not identify the valuation gain Korea would realize from adopting Japan-style reforms</a:t>
+            </a:r>
+          </a:p>
+          <a:p>
+            <a:pPr lvl="1">
+              <a:spcBef>
+                <a:spcPts val="300"/>
+              </a:spcBef>
+            </a:pPr>
+            <a:r>
+              <a:rPr sz="1300" b="0" i="0" dirty="0">
+                <a:solidFill>
+                  <a:srgbClr val="000000"/>
+                </a:solidFill>
+                <a:latin typeface="Calibri"/>
+              </a:rPr>
+              <a:t>•  Future work: firm-level chaebol governance panel; Korea Value-Up Program event study (2024–2026+)</a:t>
             </a:r>
           </a:p>
         </p:txBody>
